--- a/public/fun/pack/pptx/reviewpro/보장점검양식프리미엄_44_부모님점검_샴페인누아르.pptx
+++ b/public/fun/pack/pptx/reviewpro/보장점검양식프리미엄_44_부모님점검_샴페인누아르.pptx
@@ -112,12 +112,12 @@
   <p:extLst>
     <p:ext uri="{521415D9-36F7-43E2-AB2F-B90AF26B5E84}">
       <p14:sectionLst xmlns:p14="http://schemas.microsoft.com/office/powerpoint/2010/main">
-        <p14:section name="시작" id="{E9271FB4-CA94-4D0B-AA81-E85937105F31}">
+        <p14:section name="시작" id="{6E9DC5AF-6C25-4B76-A5CF-0EAEC20AE45E}">
           <p14:sldIdLst>
             <p14:sldId id="256"/>
           </p14:sldIdLst>
         </p14:section>
-        <p14:section name="본문" id="{12707926-598F-4226-BB89-CCD9E8DD9A2D}">
+        <p14:section name="본문" id="{2FD60A05-F502-4109-8963-0D8076167F7F}">
           <p14:sldIdLst>
             <p14:sldId id="257"/>
             <p14:sldId id="258"/>
@@ -1601,7 +1601,7 @@
             </a:lvl1pPr>
           </a:lstStyle>
           <a:p>
-            <a:fld id="{E4A045AC-0943-4E00-8799-CFBFB32B3FEE}" type="slidenum">
+            <a:fld id="{61C981FD-04E7-464E-8198-DED5B87F4A44}" type="slidenum">
               <a:rPr lang="en-US"/>
               <a:t>‹#›</a:t>
             </a:fld>
@@ -2634,7 +2634,7 @@
             </a:lvl1pPr>
           </a:lstStyle>
           <a:p>
-            <a:fld id="{AF0B8D40-62B2-4B6D-9739-1BC763CCED3F}" type="slidenum">
+            <a:fld id="{3A048037-DD2E-47E6-9E54-EC747164AD56}" type="slidenum">
               <a:rPr lang="en-US"/>
               <a:t>‹#›</a:t>
             </a:fld>
@@ -3641,7 +3641,7 @@
             </a:lvl1pPr>
           </a:lstStyle>
           <a:p>
-            <a:fld id="{05784B75-827F-466E-8340-44700B5EE40F}" type="slidenum">
+            <a:fld id="{6397E836-207C-4B04-BBDD-7866C9A92AC1}" type="slidenum">
               <a:rPr lang="en-US"/>
               <a:t>‹#›</a:t>
             </a:fld>
@@ -4782,7 +4782,7 @@
           <a:p>
             <a:r>
               <a:rPr lang="ko-KR"/>
-              <a:t>설날에 가서 증권철 위치를 확인합니다</a:t>
+              <a:t>찾아뵙고 증권철 위치를 확인합니다</a:t>
             </a:r>
           </a:p>
         </p:txBody>
@@ -4804,7 +4804,7 @@
           <a:p>
             <a:r>
               <a:rPr lang="ko-KR"/>
-              <a:t>부모님 점검 · 0000. 00. 00</a:t>
+              <a:t>부모님 점검 · 날짜 입력</a:t>
             </a:r>
           </a:p>
           <a:p>
@@ -4895,7 +4895,7 @@
           <a:bodyPr/>
           <a:lstStyle/>
           <a:p>
-            <a:fld id="{B4503716-373C-430D-85CB-0215362556F3}" type="slidenum">
+            <a:fld id="{ED2B2D3E-7706-47A5-B7A5-E6ACA39461B8}" type="slidenum">
               <a:rPr lang="en-US"/>
               <a:t>‹#›</a:t>
             </a:fld>
@@ -5608,7 +5608,7 @@
           <a:bodyPr/>
           <a:lstStyle/>
           <a:p>
-            <a:fld id="{1C2E366D-AFAD-4B83-9D05-009A56DDD398}" type="slidenum">
+            <a:fld id="{EB0B1AE8-DB10-4EEF-BD31-79CC964AC860}" type="slidenum">
               <a:rPr lang="en-US"/>
               <a:t>‹#›</a:t>
             </a:fld>
@@ -7114,7 +7114,7 @@
           <a:bodyPr/>
           <a:lstStyle/>
           <a:p>
-            <a:fld id="{28826821-801F-4E46-8DDF-29EC1FF5659F}" type="slidenum">
+            <a:fld id="{C0F115B4-102B-4801-BF3E-1C8D497E0C78}" type="slidenum">
               <a:rPr lang="en-US"/>
               <a:t>‹#›</a:t>
             </a:fld>
@@ -8664,7 +8664,7 @@
           <a:bodyPr/>
           <a:lstStyle/>
           <a:p>
-            <a:fld id="{E653E4AD-F7CF-4C9C-894A-AACCBA488E9B}" type="slidenum">
+            <a:fld id="{F425B282-E50C-4DBA-A30B-93F475973B9A}" type="slidenum">
               <a:rPr lang="en-US"/>
               <a:t>‹#›</a:t>
             </a:fld>
@@ -9526,7 +9526,7 @@
           <a:bodyPr/>
           <a:lstStyle/>
           <a:p>
-            <a:fld id="{A596F68E-4D87-420E-BE9A-7462D23CCCDD}" type="slidenum">
+            <a:fld id="{26DF5184-E45D-46E2-A6BA-CA8EF515286F}" type="slidenum">
               <a:rPr lang="en-US"/>
               <a:t>‹#›</a:t>
             </a:fld>
